--- a/generated/Tier 1 Broker Scorecards/USA SPECIALTY INSURANCE_DBA PREVENTTY_Broker_Scorecard.pptx
+++ b/generated/Tier 1 Broker Scorecards/USA SPECIALTY INSURANCE_DBA PREVENTTY_Broker_Scorecard.pptx
@@ -3357,7 +3357,7 @@
                         <a:rPr sz="800">
                           <a:latin typeface="Segoe UI"/>
                         </a:rPr>
-                        <a:t>$13,138,537.44 / $16,970,931.26 / $7,107,808.40</a:t>
+                        <a:t>$13,138,537.44 / $16,987,003.21 / $7,123,880.35</a:t>
                       </a:r>
                     </a:p>
                   </a:txBody>
@@ -3394,7 +3394,7 @@
                         <a:rPr sz="900">
                           <a:latin typeface="Segoe UI"/>
                         </a:rPr>
-                        <a:t>Tier 1  |  8.49% / 15.00%</a:t>
+                        <a:t>Tier 1  |  8.44% / 15.00%</a:t>
                       </a:r>
                     </a:p>
                   </a:txBody>
@@ -3431,7 +3431,7 @@
                         <a:rPr sz="900">
                           <a:latin typeface="Segoe UI"/>
                         </a:rPr>
-                        <a:t>$18,393,952.42  (38.6% achieved)</a:t>
+                        <a:t>$18,393,952.42  (38.7% achieved)</a:t>
                       </a:r>
                     </a:p>
                   </a:txBody>
@@ -3653,7 +3653,7 @@
                         <a:rPr sz="900">
                           <a:latin typeface="Segoe UI"/>
                         </a:rPr>
-                        <a:t>Fleet Subs: 271  |  Binds: 19</a:t>
+                        <a:t>Fleet Subs: 273  |  Binds: 18</a:t>
                       </a:r>
                     </a:p>
                   </a:txBody>
@@ -3690,7 +3690,7 @@
                         <a:rPr sz="900">
                           <a:latin typeface="Segoe UI"/>
                         </a:rPr>
-                        <a:t>Fleet Bound Premium: $1,536,388.62</a:t>
+                        <a:t>Fleet Bound Premium: $1,467,203.96</a:t>
                       </a:r>
                     </a:p>
                   </a:txBody>
@@ -3727,7 +3727,7 @@
                         <a:rPr sz="900">
                           <a:latin typeface="Segoe UI"/>
                         </a:rPr>
-                        <a:t>Fleet Book %: 21.6%</a:t>
+                        <a:t>Fleet Book %: 20.6%</a:t>
                       </a:r>
                     </a:p>
                   </a:txBody>
@@ -3766,7 +3766,7 @@
                         <a:rPr sz="900">
                           <a:latin typeface="Segoe UI"/>
                         </a:rPr>
-                        <a:t>Non-Fleet Subs: 2592  |  Binds: 224</a:t>
+                        <a:t>Non-Fleet Subs: 2607  |  Binds: 225</a:t>
                       </a:r>
                     </a:p>
                   </a:txBody>
@@ -3803,7 +3803,7 @@
                         <a:rPr sz="900">
                           <a:latin typeface="Segoe UI"/>
                         </a:rPr>
-                        <a:t>Non-Fleet Bound Premium: $5,571,419.78</a:t>
+                        <a:t>Non-Fleet Bound Premium: $5,656,676.39</a:t>
                       </a:r>
                     </a:p>
                   </a:txBody>
@@ -3840,7 +3840,7 @@
                         <a:rPr sz="900">
                           <a:latin typeface="Segoe UI"/>
                         </a:rPr>
-                        <a:t>Non-Fleet Book %: 78.4%</a:t>
+                        <a:t>Non-Fleet Book %: 79.4%</a:t>
                       </a:r>
                     </a:p>
                   </a:txBody>
@@ -4428,7 +4428,7 @@
                           </a:solidFill>
                           <a:latin typeface="Segoe UI"/>
                         </a:rPr>
-                        <a:t>351</a:t>
+                        <a:t>374</a:t>
                       </a:r>
                     </a:p>
                   </a:txBody>
@@ -4707,7 +4707,7 @@
                           </a:solidFill>
                           <a:latin typeface="Segoe UI"/>
                         </a:rPr>
-                        <a:t>12.0%</a:t>
+                        <a:t>11.0%</a:t>
                       </a:r>
                     </a:p>
                   </a:txBody>
@@ -4747,7 +4747,7 @@
                         <a:rPr sz="800">
                           <a:latin typeface="Segoe UI"/>
                         </a:rPr>
-                        <a:t>15.6%</a:t>
+                        <a:t>15.4%</a:t>
                       </a:r>
                     </a:p>
                   </a:txBody>
@@ -4983,7 +4983,7 @@
                           </a:solidFill>
                           <a:latin typeface="Segoe UI"/>
                         </a:rPr>
-                        <a:t>42</a:t>
+                        <a:t>41</a:t>
                       </a:r>
                     </a:p>
                   </a:txBody>
@@ -5020,7 +5020,7 @@
                         <a:rPr sz="800">
                           <a:latin typeface="Segoe UI"/>
                         </a:rPr>
-                        <a:t>114</a:t>
+                        <a:t>113</a:t>
                       </a:r>
                     </a:p>
                   </a:txBody>
@@ -5262,7 +5262,7 @@
                           </a:solidFill>
                           <a:latin typeface="Segoe UI"/>
                         </a:rPr>
-                        <a:t>$1.04M</a:t>
+                        <a:t>$1.06M</a:t>
                       </a:r>
                     </a:p>
                   </a:txBody>

--- a/generated/Tier 1 Broker Scorecards/USA SPECIALTY INSURANCE_DBA PREVENTTY_Broker_Scorecard.pptx
+++ b/generated/Tier 1 Broker Scorecards/USA SPECIALTY INSURANCE_DBA PREVENTTY_Broker_Scorecard.pptx
@@ -3394,7 +3394,7 @@
                         <a:rPr sz="900">
                           <a:latin typeface="Segoe UI"/>
                         </a:rPr>
-                        <a:t>Tier 1  |  8.44% / 15.00%</a:t>
+                        <a:t>Tier 1  |  8.29% / 15.00%</a:t>
                       </a:r>
                     </a:p>
                   </a:txBody>
@@ -3653,7 +3653,7 @@
                         <a:rPr sz="900">
                           <a:latin typeface="Segoe UI"/>
                         </a:rPr>
-                        <a:t>Fleet Subs: 273  |  Binds: 18</a:t>
+                        <a:t>Fleet Subs: 275  |  Binds: 18</a:t>
                       </a:r>
                     </a:p>
                   </a:txBody>
@@ -3690,7 +3690,7 @@
                         <a:rPr sz="900">
                           <a:latin typeface="Segoe UI"/>
                         </a:rPr>
-                        <a:t>Fleet Bound Premium: $1,467,203.96</a:t>
+                        <a:t>Fleet Bound Premium: $1,494,959.02</a:t>
                       </a:r>
                     </a:p>
                   </a:txBody>
@@ -3727,7 +3727,7 @@
                         <a:rPr sz="900">
                           <a:latin typeface="Segoe UI"/>
                         </a:rPr>
-                        <a:t>Fleet Book %: 20.6%</a:t>
+                        <a:t>Fleet Book %: 21.0%</a:t>
                       </a:r>
                     </a:p>
                   </a:txBody>
@@ -3766,7 +3766,7 @@
                         <a:rPr sz="900">
                           <a:latin typeface="Segoe UI"/>
                         </a:rPr>
-                        <a:t>Non-Fleet Subs: 2607  |  Binds: 225</a:t>
+                        <a:t>Non-Fleet Subs: 2631  |  Binds: 223</a:t>
                       </a:r>
                     </a:p>
                   </a:txBody>
@@ -3803,7 +3803,7 @@
                         <a:rPr sz="900">
                           <a:latin typeface="Segoe UI"/>
                         </a:rPr>
-                        <a:t>Non-Fleet Bound Premium: $5,656,676.39</a:t>
+                        <a:t>Non-Fleet Bound Premium: $5,628,921.33</a:t>
                       </a:r>
                     </a:p>
                   </a:txBody>
@@ -3840,7 +3840,7 @@
                         <a:rPr sz="900">
                           <a:latin typeface="Segoe UI"/>
                         </a:rPr>
-                        <a:t>Non-Fleet Book %: 79.4%</a:t>
+                        <a:t>Non-Fleet Book %: 79.0%</a:t>
                       </a:r>
                     </a:p>
                   </a:txBody>
@@ -4428,7 +4428,7 @@
                           </a:solidFill>
                           <a:latin typeface="Segoe UI"/>
                         </a:rPr>
-                        <a:t>374</a:t>
+                        <a:t>407</a:t>
                       </a:r>
                     </a:p>
                   </a:txBody>
@@ -4624,7 +4624,7 @@
                           </a:solidFill>
                           <a:latin typeface="Segoe UI"/>
                         </a:rPr>
-                        <a:t>11.6%</a:t>
+                        <a:t>11.7%</a:t>
                       </a:r>
                     </a:p>
                   </a:txBody>
@@ -4707,7 +4707,7 @@
                           </a:solidFill>
                           <a:latin typeface="Segoe UI"/>
                         </a:rPr>
-                        <a:t>11.0%</a:t>
+                        <a:t>11.1%</a:t>
                       </a:r>
                     </a:p>
                   </a:txBody>
@@ -4747,7 +4747,7 @@
                         <a:rPr sz="800">
                           <a:latin typeface="Segoe UI"/>
                         </a:rPr>
-                        <a:t>15.4%</a:t>
+                        <a:t>15.6%</a:t>
                       </a:r>
                     </a:p>
                   </a:txBody>
@@ -4906,7 +4906,7 @@
                           </a:solidFill>
                           <a:latin typeface="Segoe UI"/>
                         </a:rPr>
-                        <a:t>106</a:t>
+                        <a:t>107</a:t>
                       </a:r>
                     </a:p>
                   </a:txBody>
@@ -4983,7 +4983,7 @@
                           </a:solidFill>
                           <a:latin typeface="Segoe UI"/>
                         </a:rPr>
-                        <a:t>41</a:t>
+                        <a:t>45</a:t>
                       </a:r>
                     </a:p>
                   </a:txBody>
@@ -5020,7 +5020,7 @@
                         <a:rPr sz="800">
                           <a:latin typeface="Segoe UI"/>
                         </a:rPr>
-                        <a:t>113</a:t>
+                        <a:t>114</a:t>
                       </a:r>
                     </a:p>
                   </a:txBody>

--- a/generated/Tier 1 Broker Scorecards/USA SPECIALTY INSURANCE_DBA PREVENTTY_Broker_Scorecard.pptx
+++ b/generated/Tier 1 Broker Scorecards/USA SPECIALTY INSURANCE_DBA PREVENTTY_Broker_Scorecard.pptx
@@ -3357,7 +3357,7 @@
                         <a:rPr sz="800">
                           <a:latin typeface="Segoe UI"/>
                         </a:rPr>
-                        <a:t>$13,138,537.44 / $16,987,003.21 / $7,123,880.35</a:t>
+                        <a:t>$13,138,537.44 / $17,192,273.18 / $7,329,150.32</a:t>
                       </a:r>
                     </a:p>
                   </a:txBody>
@@ -3394,7 +3394,7 @@
                         <a:rPr sz="900">
                           <a:latin typeface="Segoe UI"/>
                         </a:rPr>
-                        <a:t>Tier 1  |  8.29% / 15.00%</a:t>
+                        <a:t>Tier 1  |  8.28% / 15.00%</a:t>
                       </a:r>
                     </a:p>
                   </a:txBody>
@@ -3431,7 +3431,7 @@
                         <a:rPr sz="900">
                           <a:latin typeface="Segoe UI"/>
                         </a:rPr>
-                        <a:t>$18,393,952.42  (38.7% achieved)</a:t>
+                        <a:t>$18,393,952.42  (39.8% achieved)</a:t>
                       </a:r>
                     </a:p>
                   </a:txBody>
@@ -3653,7 +3653,7 @@
                         <a:rPr sz="900">
                           <a:latin typeface="Segoe UI"/>
                         </a:rPr>
-                        <a:t>Fleet Subs: 275  |  Binds: 18</a:t>
+                        <a:t>Fleet Subs: 278  |  Binds: 18</a:t>
                       </a:r>
                     </a:p>
                   </a:txBody>
@@ -3690,7 +3690,7 @@
                         <a:rPr sz="900">
                           <a:latin typeface="Segoe UI"/>
                         </a:rPr>
-                        <a:t>Fleet Bound Premium: $1,494,959.02</a:t>
+                        <a:t>Fleet Bound Premium: $1,518,387.12</a:t>
                       </a:r>
                     </a:p>
                   </a:txBody>
@@ -3727,7 +3727,7 @@
                         <a:rPr sz="900">
                           <a:latin typeface="Segoe UI"/>
                         </a:rPr>
-                        <a:t>Fleet Book %: 21.0%</a:t>
+                        <a:t>Fleet Book %: 20.7%</a:t>
                       </a:r>
                     </a:p>
                   </a:txBody>
@@ -3766,7 +3766,7 @@
                         <a:rPr sz="900">
                           <a:latin typeface="Segoe UI"/>
                         </a:rPr>
-                        <a:t>Non-Fleet Subs: 2631  |  Binds: 223</a:t>
+                        <a:t>Non-Fleet Subs: 2658  |  Binds: 225</a:t>
                       </a:r>
                     </a:p>
                   </a:txBody>
@@ -3803,7 +3803,7 @@
                         <a:rPr sz="900">
                           <a:latin typeface="Segoe UI"/>
                         </a:rPr>
-                        <a:t>Non-Fleet Bound Premium: $5,628,921.33</a:t>
+                        <a:t>Non-Fleet Bound Premium: $5,810,763.20</a:t>
                       </a:r>
                     </a:p>
                   </a:txBody>
@@ -3840,7 +3840,7 @@
                         <a:rPr sz="900">
                           <a:latin typeface="Segoe UI"/>
                         </a:rPr>
-                        <a:t>Non-Fleet Book %: 79.0%</a:t>
+                        <a:t>Non-Fleet Book %: 79.3%</a:t>
                       </a:r>
                     </a:p>
                   </a:txBody>
@@ -4428,7 +4428,7 @@
                           </a:solidFill>
                           <a:latin typeface="Segoe UI"/>
                         </a:rPr>
-                        <a:t>407</a:t>
+                        <a:t>442</a:t>
                       </a:r>
                     </a:p>
                   </a:txBody>
@@ -4624,7 +4624,7 @@
                           </a:solidFill>
                           <a:latin typeface="Segoe UI"/>
                         </a:rPr>
-                        <a:t>11.7%</a:t>
+                        <a:t>12.0%</a:t>
                       </a:r>
                     </a:p>
                   </a:txBody>
@@ -4747,7 +4747,7 @@
                         <a:rPr sz="800">
                           <a:latin typeface="Segoe UI"/>
                         </a:rPr>
-                        <a:t>15.6%</a:t>
+                        <a:t>15.4%</a:t>
                       </a:r>
                     </a:p>
                   </a:txBody>
@@ -4906,7 +4906,7 @@
                           </a:solidFill>
                           <a:latin typeface="Segoe UI"/>
                         </a:rPr>
-                        <a:t>107</a:t>
+                        <a:t>109</a:t>
                       </a:r>
                     </a:p>
                   </a:txBody>
@@ -4983,7 +4983,7 @@
                           </a:solidFill>
                           <a:latin typeface="Segoe UI"/>
                         </a:rPr>
-                        <a:t>45</a:t>
+                        <a:t>49</a:t>
                       </a:r>
                     </a:p>
                   </a:txBody>
@@ -5020,7 +5020,7 @@
                         <a:rPr sz="800">
                           <a:latin typeface="Segoe UI"/>
                         </a:rPr>
-                        <a:t>114</a:t>
+                        <a:t>113</a:t>
                       </a:r>
                     </a:p>
                   </a:txBody>
@@ -5179,7 +5179,7 @@
                           </a:solidFill>
                           <a:latin typeface="Segoe UI"/>
                         </a:rPr>
-                        <a:t>$1.81M</a:t>
+                        <a:t>$1.84M</a:t>
                       </a:r>
                     </a:p>
                   </a:txBody>
@@ -5262,7 +5262,7 @@
                           </a:solidFill>
                           <a:latin typeface="Segoe UI"/>
                         </a:rPr>
-                        <a:t>$1.06M</a:t>
+                        <a:t>$1.23M</a:t>
                       </a:r>
                     </a:p>
                   </a:txBody>

--- a/generated/Tier 1 Broker Scorecards/USA SPECIALTY INSURANCE_DBA PREVENTTY_Broker_Scorecard.pptx
+++ b/generated/Tier 1 Broker Scorecards/USA SPECIALTY INSURANCE_DBA PREVENTTY_Broker_Scorecard.pptx
@@ -3357,7 +3357,7 @@
                         <a:rPr sz="800">
                           <a:latin typeface="Segoe UI"/>
                         </a:rPr>
-                        <a:t>$13,138,537.44 / $17,192,273.18 / $7,329,150.32</a:t>
+                        <a:t>$13,138,537.44 / $17,364,568.36 / $7,501,445.50</a:t>
                       </a:r>
                     </a:p>
                   </a:txBody>
@@ -3394,7 +3394,7 @@
                         <a:rPr sz="900">
                           <a:latin typeface="Segoe UI"/>
                         </a:rPr>
-                        <a:t>Tier 1  |  8.28% / 15.00%</a:t>
+                        <a:t>Tier 1  |  8.51% / 15.00%</a:t>
                       </a:r>
                     </a:p>
                   </a:txBody>
@@ -3431,7 +3431,7 @@
                         <a:rPr sz="900">
                           <a:latin typeface="Segoe UI"/>
                         </a:rPr>
-                        <a:t>$18,393,952.42  (39.8% achieved)</a:t>
+                        <a:t>$18,393,952.42  (40.8% achieved)</a:t>
                       </a:r>
                     </a:p>
                   </a:txBody>
@@ -3653,7 +3653,7 @@
                         <a:rPr sz="900">
                           <a:latin typeface="Segoe UI"/>
                         </a:rPr>
-                        <a:t>Fleet Subs: 278  |  Binds: 18</a:t>
+                        <a:t>Fleet Subs: 282  |  Binds: 20</a:t>
                       </a:r>
                     </a:p>
                   </a:txBody>
@@ -3690,7 +3690,7 @@
                         <a:rPr sz="900">
                           <a:latin typeface="Segoe UI"/>
                         </a:rPr>
-                        <a:t>Fleet Bound Premium: $1,518,387.12</a:t>
+                        <a:t>Fleet Bound Premium: $1,650,256.91</a:t>
                       </a:r>
                     </a:p>
                   </a:txBody>
@@ -3727,7 +3727,7 @@
                         <a:rPr sz="900">
                           <a:latin typeface="Segoe UI"/>
                         </a:rPr>
-                        <a:t>Fleet Book %: 20.7%</a:t>
+                        <a:t>Fleet Book %: 22.0%</a:t>
                       </a:r>
                     </a:p>
                   </a:txBody>
@@ -3766,7 +3766,7 @@
                         <a:rPr sz="900">
                           <a:latin typeface="Segoe UI"/>
                         </a:rPr>
-                        <a:t>Non-Fleet Subs: 2658  |  Binds: 225</a:t>
+                        <a:t>Non-Fleet Subs: 2680  |  Binds: 232</a:t>
                       </a:r>
                     </a:p>
                   </a:txBody>
@@ -3803,7 +3803,7 @@
                         <a:rPr sz="900">
                           <a:latin typeface="Segoe UI"/>
                         </a:rPr>
-                        <a:t>Non-Fleet Bound Premium: $5,810,763.20</a:t>
+                        <a:t>Non-Fleet Bound Premium: $5,851,188.59</a:t>
                       </a:r>
                     </a:p>
                   </a:txBody>
@@ -3840,7 +3840,7 @@
                         <a:rPr sz="900">
                           <a:latin typeface="Segoe UI"/>
                         </a:rPr>
-                        <a:t>Non-Fleet Book %: 79.3%</a:t>
+                        <a:t>Non-Fleet Book %: 78.0%</a:t>
                       </a:r>
                     </a:p>
                   </a:txBody>
@@ -4428,7 +4428,7 @@
                           </a:solidFill>
                           <a:latin typeface="Segoe UI"/>
                         </a:rPr>
-                        <a:t>442</a:t>
+                        <a:t>472</a:t>
                       </a:r>
                     </a:p>
                   </a:txBody>
@@ -4624,7 +4624,7 @@
                           </a:solidFill>
                           <a:latin typeface="Segoe UI"/>
                         </a:rPr>
-                        <a:t>12.0%</a:t>
+                        <a:t>12.1%</a:t>
                       </a:r>
                     </a:p>
                   </a:txBody>
@@ -4664,7 +4664,7 @@
                         <a:rPr sz="800">
                           <a:latin typeface="Segoe UI"/>
                         </a:rPr>
-                        <a:t>13.5%</a:t>
+                        <a:t>13.3%</a:t>
                       </a:r>
                     </a:p>
                   </a:txBody>
@@ -4707,7 +4707,7 @@
                           </a:solidFill>
                           <a:latin typeface="Segoe UI"/>
                         </a:rPr>
-                        <a:t>11.1%</a:t>
+                        <a:t>11.4%</a:t>
                       </a:r>
                     </a:p>
                   </a:txBody>
@@ -4747,7 +4747,7 @@
                         <a:rPr sz="800">
                           <a:latin typeface="Segoe UI"/>
                         </a:rPr>
-                        <a:t>15.4%</a:t>
+                        <a:t>15.7%</a:t>
                       </a:r>
                     </a:p>
                   </a:txBody>
@@ -4906,7 +4906,7 @@
                           </a:solidFill>
                           <a:latin typeface="Segoe UI"/>
                         </a:rPr>
-                        <a:t>109</a:t>
+                        <a:t>110</a:t>
                       </a:r>
                     </a:p>
                   </a:txBody>
@@ -4943,7 +4943,7 @@
                         <a:rPr sz="800">
                           <a:latin typeface="Segoe UI"/>
                         </a:rPr>
-                        <a:t>100</a:t>
+                        <a:t>99</a:t>
                       </a:r>
                     </a:p>
                   </a:txBody>
@@ -4983,7 +4983,7 @@
                           </a:solidFill>
                           <a:latin typeface="Segoe UI"/>
                         </a:rPr>
-                        <a:t>49</a:t>
+                        <a:t>54</a:t>
                       </a:r>
                     </a:p>
                   </a:txBody>
@@ -5020,7 +5020,7 @@
                         <a:rPr sz="800">
                           <a:latin typeface="Segoe UI"/>
                         </a:rPr>
-                        <a:t>113</a:t>
+                        <a:t>115</a:t>
                       </a:r>
                     </a:p>
                   </a:txBody>
@@ -5258,11 +5258,11 @@
                       <a:r>
                         <a:rPr sz="800" b="1">
                           <a:solidFill>
-                            <a:srgbClr val="DC2626"/>
+                            <a:srgbClr val="059669"/>
                           </a:solidFill>
                           <a:latin typeface="Segoe UI"/>
                         </a:rPr>
-                        <a:t>$1.23M</a:t>
+                        <a:t>$1.40M</a:t>
                       </a:r>
                     </a:p>
                   </a:txBody>
@@ -5339,10 +5339,13 @@
                     <a:p>
                       <a:pPr algn="ctr"/>
                       <a:r>
-                        <a:rPr sz="800">
+                        <a:rPr sz="800" b="1">
+                          <a:solidFill>
+                            <a:srgbClr val="DC2626"/>
+                          </a:solidFill>
                           <a:latin typeface="Segoe UI"/>
                         </a:rPr>
-                        <a:t/>
+                        <a:t>$32.0K</a:t>
                       </a:r>
                     </a:p>
                   </a:txBody>

--- a/generated/Tier 1 Broker Scorecards/USA SPECIALTY INSURANCE_DBA PREVENTTY_Broker_Scorecard.pptx
+++ b/generated/Tier 1 Broker Scorecards/USA SPECIALTY INSURANCE_DBA PREVENTTY_Broker_Scorecard.pptx
@@ -3357,7 +3357,7 @@
                         <a:rPr sz="800">
                           <a:latin typeface="Segoe UI"/>
                         </a:rPr>
-                        <a:t>$13,138,537.44 / $17,364,568.36 / $7,501,445.50</a:t>
+                        <a:t>$13,138,537.44 / $17,446,359.16 / $7,583,236.30</a:t>
                       </a:r>
                     </a:p>
                   </a:txBody>
@@ -3394,7 +3394,7 @@
                         <a:rPr sz="900">
                           <a:latin typeface="Segoe UI"/>
                         </a:rPr>
-                        <a:t>Tier 1  |  8.51% / 15.00%</a:t>
+                        <a:t>Tier 1  |  8.23% / 15.00%</a:t>
                       </a:r>
                     </a:p>
                   </a:txBody>
@@ -3431,7 +3431,7 @@
                         <a:rPr sz="900">
                           <a:latin typeface="Segoe UI"/>
                         </a:rPr>
-                        <a:t>$18,393,952.42  (40.8% achieved)</a:t>
+                        <a:t>$18,393,952.42  (41.2% achieved)</a:t>
                       </a:r>
                     </a:p>
                   </a:txBody>
@@ -3653,7 +3653,7 @@
                         <a:rPr sz="900">
                           <a:latin typeface="Segoe UI"/>
                         </a:rPr>
-                        <a:t>Fleet Subs: 282  |  Binds: 20</a:t>
+                        <a:t>Fleet Subs: 286  |  Binds: 22</a:t>
                       </a:r>
                     </a:p>
                   </a:txBody>
@@ -3690,7 +3690,7 @@
                         <a:rPr sz="900">
                           <a:latin typeface="Segoe UI"/>
                         </a:rPr>
-                        <a:t>Fleet Bound Premium: $1,650,256.91</a:t>
+                        <a:t>Fleet Bound Premium: $1,838,939.04</a:t>
                       </a:r>
                     </a:p>
                   </a:txBody>
@@ -3727,7 +3727,7 @@
                         <a:rPr sz="900">
                           <a:latin typeface="Segoe UI"/>
                         </a:rPr>
-                        <a:t>Fleet Book %: 22.0%</a:t>
+                        <a:t>Fleet Book %: 24.3%</a:t>
                       </a:r>
                     </a:p>
                   </a:txBody>
@@ -3766,7 +3766,7 @@
                         <a:rPr sz="900">
                           <a:latin typeface="Segoe UI"/>
                         </a:rPr>
-                        <a:t>Non-Fleet Subs: 2680  |  Binds: 232</a:t>
+                        <a:t>Non-Fleet Subs: 2704  |  Binds: 224</a:t>
                       </a:r>
                     </a:p>
                   </a:txBody>
@@ -3803,7 +3803,7 @@
                         <a:rPr sz="900">
                           <a:latin typeface="Segoe UI"/>
                         </a:rPr>
-                        <a:t>Non-Fleet Bound Premium: $5,851,188.59</a:t>
+                        <a:t>Non-Fleet Bound Premium: $5,744,297.26</a:t>
                       </a:r>
                     </a:p>
                   </a:txBody>
@@ -3840,7 +3840,7 @@
                         <a:rPr sz="900">
                           <a:latin typeface="Segoe UI"/>
                         </a:rPr>
-                        <a:t>Non-Fleet Book %: 78.0%</a:t>
+                        <a:t>Non-Fleet Book %: 75.7%</a:t>
                       </a:r>
                     </a:p>
                   </a:txBody>
@@ -4351,7 +4351,7 @@
                           </a:solidFill>
                           <a:latin typeface="Segoe UI"/>
                         </a:rPr>
-                        <a:t>911</a:t>
+                        <a:t>910</a:t>
                       </a:r>
                     </a:p>
                   </a:txBody>
@@ -4428,7 +4428,7 @@
                           </a:solidFill>
                           <a:latin typeface="Segoe UI"/>
                         </a:rPr>
-                        <a:t>472</a:t>
+                        <a:t>512</a:t>
                       </a:r>
                     </a:p>
                   </a:txBody>
@@ -4664,7 +4664,7 @@
                         <a:rPr sz="800">
                           <a:latin typeface="Segoe UI"/>
                         </a:rPr>
-                        <a:t>13.3%</a:t>
+                        <a:t>13.5%</a:t>
                       </a:r>
                     </a:p>
                   </a:txBody>
@@ -4707,7 +4707,7 @@
                           </a:solidFill>
                           <a:latin typeface="Segoe UI"/>
                         </a:rPr>
-                        <a:t>11.4%</a:t>
+                        <a:t>10.5%</a:t>
                       </a:r>
                     </a:p>
                   </a:txBody>
@@ -4747,7 +4747,7 @@
                         <a:rPr sz="800">
                           <a:latin typeface="Segoe UI"/>
                         </a:rPr>
-                        <a:t>15.7%</a:t>
+                        <a:t>15.6%</a:t>
                       </a:r>
                     </a:p>
                   </a:txBody>
@@ -4943,7 +4943,7 @@
                         <a:rPr sz="800">
                           <a:latin typeface="Segoe UI"/>
                         </a:rPr>
-                        <a:t>99</a:t>
+                        <a:t>100</a:t>
                       </a:r>
                     </a:p>
                   </a:txBody>
@@ -5020,7 +5020,7 @@
                         <a:rPr sz="800">
                           <a:latin typeface="Segoe UI"/>
                         </a:rPr>
-                        <a:t>115</a:t>
+                        <a:t>114</a:t>
                       </a:r>
                     </a:p>
                   </a:txBody>
@@ -5262,7 +5262,7 @@
                           </a:solidFill>
                           <a:latin typeface="Segoe UI"/>
                         </a:rPr>
-                        <a:t>$1.40M</a:t>
+                        <a:t>$1.48M</a:t>
                       </a:r>
                     </a:p>
                   </a:txBody>

--- a/generated/Tier 1 Broker Scorecards/USA SPECIALTY INSURANCE_DBA PREVENTTY_Broker_Scorecard.pptx
+++ b/generated/Tier 1 Broker Scorecards/USA SPECIALTY INSURANCE_DBA PREVENTTY_Broker_Scorecard.pptx
@@ -3394,7 +3394,7 @@
                         <a:rPr sz="900">
                           <a:latin typeface="Segoe UI"/>
                         </a:rPr>
-                        <a:t>Tier 1  |  8.23% / 15.00%</a:t>
+                        <a:t>Tier 1  |  8.19% / 15.00%</a:t>
                       </a:r>
                     </a:p>
                   </a:txBody>
@@ -3690,7 +3690,7 @@
                         <a:rPr sz="900">
                           <a:latin typeface="Segoe UI"/>
                         </a:rPr>
-                        <a:t>Fleet Bound Premium: $1,838,939.04</a:t>
+                        <a:t>Fleet Bound Premium: $1,856,301.86</a:t>
                       </a:r>
                     </a:p>
                   </a:txBody>
@@ -3727,7 +3727,7 @@
                         <a:rPr sz="900">
                           <a:latin typeface="Segoe UI"/>
                         </a:rPr>
-                        <a:t>Fleet Book %: 24.3%</a:t>
+                        <a:t>Fleet Book %: 24.5%</a:t>
                       </a:r>
                     </a:p>
                   </a:txBody>
@@ -3766,7 +3766,7 @@
                         <a:rPr sz="900">
                           <a:latin typeface="Segoe UI"/>
                         </a:rPr>
-                        <a:t>Non-Fleet Subs: 2704  |  Binds: 224</a:t>
+                        <a:t>Non-Fleet Subs: 2704  |  Binds: 223</a:t>
                       </a:r>
                     </a:p>
                   </a:txBody>
@@ -3803,7 +3803,7 @@
                         <a:rPr sz="900">
                           <a:latin typeface="Segoe UI"/>
                         </a:rPr>
-                        <a:t>Non-Fleet Bound Premium: $5,744,297.26</a:t>
+                        <a:t>Non-Fleet Bound Premium: $5,726,934.44</a:t>
                       </a:r>
                     </a:p>
                   </a:txBody>
@@ -3840,7 +3840,7 @@
                         <a:rPr sz="900">
                           <a:latin typeface="Segoe UI"/>
                         </a:rPr>
-                        <a:t>Non-Fleet Book %: 75.7%</a:t>
+                        <a:t>Non-Fleet Book %: 75.5%</a:t>
                       </a:r>
                     </a:p>
                   </a:txBody>
@@ -4624,7 +4624,7 @@
                           </a:solidFill>
                           <a:latin typeface="Segoe UI"/>
                         </a:rPr>
-                        <a:t>12.1%</a:t>
+                        <a:t>12.0%</a:t>
                       </a:r>
                     </a:p>
                   </a:txBody>
@@ -4747,7 +4747,7 @@
                         <a:rPr sz="800">
                           <a:latin typeface="Segoe UI"/>
                         </a:rPr>
-                        <a:t>15.6%</a:t>
+                        <a:t>15.4%</a:t>
                       </a:r>
                     </a:p>
                   </a:txBody>
@@ -4906,7 +4906,7 @@
                           </a:solidFill>
                           <a:latin typeface="Segoe UI"/>
                         </a:rPr>
-                        <a:t>110</a:t>
+                        <a:t>109</a:t>
                       </a:r>
                     </a:p>
                   </a:txBody>
@@ -5020,7 +5020,7 @@
                         <a:rPr sz="800">
                           <a:latin typeface="Segoe UI"/>
                         </a:rPr>
-                        <a:t>114</a:t>
+                        <a:t>113</a:t>
                       </a:r>
                     </a:p>
                   </a:txBody>

--- a/generated/Tier 1 Broker Scorecards/USA SPECIALTY INSURANCE_DBA PREVENTTY_Broker_Scorecard.pptx
+++ b/generated/Tier 1 Broker Scorecards/USA SPECIALTY INSURANCE_DBA PREVENTTY_Broker_Scorecard.pptx
@@ -3394,7 +3394,7 @@
                         <a:rPr sz="900">
                           <a:latin typeface="Segoe UI"/>
                         </a:rPr>
-                        <a:t>Tier 1  |  8.19% / 15.00%</a:t>
+                        <a:t>Tier 1  |  8.22% / 15.00%</a:t>
                       </a:r>
                     </a:p>
                   </a:txBody>
@@ -3653,7 +3653,7 @@
                         <a:rPr sz="900">
                           <a:latin typeface="Segoe UI"/>
                         </a:rPr>
-                        <a:t>Fleet Subs: 286  |  Binds: 22</a:t>
+                        <a:t>Fleet Subs: 286  |  Binds: 21</a:t>
                       </a:r>
                     </a:p>
                   </a:txBody>
@@ -3690,7 +3690,7 @@
                         <a:rPr sz="900">
                           <a:latin typeface="Segoe UI"/>
                         </a:rPr>
-                        <a:t>Fleet Bound Premium: $1,856,301.86</a:t>
+                        <a:t>Fleet Bound Premium: $1,753,553.74</a:t>
                       </a:r>
                     </a:p>
                   </a:txBody>
@@ -3727,7 +3727,7 @@
                         <a:rPr sz="900">
                           <a:latin typeface="Segoe UI"/>
                         </a:rPr>
-                        <a:t>Fleet Book %: 24.5%</a:t>
+                        <a:t>Fleet Book %: 23.1%</a:t>
                       </a:r>
                     </a:p>
                   </a:txBody>
@@ -3766,7 +3766,7 @@
                         <a:rPr sz="900">
                           <a:latin typeface="Segoe UI"/>
                         </a:rPr>
-                        <a:t>Non-Fleet Subs: 2704  |  Binds: 223</a:t>
+                        <a:t>Non-Fleet Subs: 2706  |  Binds: 225</a:t>
                       </a:r>
                     </a:p>
                   </a:txBody>
@@ -3803,7 +3803,7 @@
                         <a:rPr sz="900">
                           <a:latin typeface="Segoe UI"/>
                         </a:rPr>
-                        <a:t>Non-Fleet Bound Premium: $5,726,934.44</a:t>
+                        <a:t>Non-Fleet Bound Premium: $5,829,682.56</a:t>
                       </a:r>
                     </a:p>
                   </a:txBody>
@@ -3840,7 +3840,7 @@
                         <a:rPr sz="900">
                           <a:latin typeface="Segoe UI"/>
                         </a:rPr>
-                        <a:t>Non-Fleet Book %: 75.5%</a:t>
+                        <a:t>Non-Fleet Book %: 76.9%</a:t>
                       </a:r>
                     </a:p>
                   </a:txBody>
@@ -4428,7 +4428,7 @@
                           </a:solidFill>
                           <a:latin typeface="Segoe UI"/>
                         </a:rPr>
-                        <a:t>512</a:t>
+                        <a:t>514</a:t>
                       </a:r>
                     </a:p>
                   </a:txBody>
@@ -4624,7 +4624,7 @@
                           </a:solidFill>
                           <a:latin typeface="Segoe UI"/>
                         </a:rPr>
-                        <a:t>12.0%</a:t>
+                        <a:t>12.1%</a:t>
                       </a:r>
                     </a:p>
                   </a:txBody>
@@ -4664,7 +4664,7 @@
                         <a:rPr sz="800">
                           <a:latin typeface="Segoe UI"/>
                         </a:rPr>
-                        <a:t>13.5%</a:t>
+                        <a:t>13.6%</a:t>
                       </a:r>
                     </a:p>
                   </a:txBody>
@@ -4747,7 +4747,7 @@
                         <a:rPr sz="800">
                           <a:latin typeface="Segoe UI"/>
                         </a:rPr>
-                        <a:t>15.4%</a:t>
+                        <a:t>15.6%</a:t>
                       </a:r>
                     </a:p>
                   </a:txBody>
@@ -4906,7 +4906,7 @@
                           </a:solidFill>
                           <a:latin typeface="Segoe UI"/>
                         </a:rPr>
-                        <a:t>109</a:t>
+                        <a:t>110</a:t>
                       </a:r>
                     </a:p>
                   </a:txBody>
@@ -4943,7 +4943,7 @@
                         <a:rPr sz="800">
                           <a:latin typeface="Segoe UI"/>
                         </a:rPr>
-                        <a:t>100</a:t>
+                        <a:t>101</a:t>
                       </a:r>
                     </a:p>
                   </a:txBody>
@@ -5020,7 +5020,7 @@
                         <a:rPr sz="800">
                           <a:latin typeface="Segoe UI"/>
                         </a:rPr>
-                        <a:t>113</a:t>
+                        <a:t>114</a:t>
                       </a:r>
                     </a:p>
                   </a:txBody>

--- a/generated/Tier 1 Broker Scorecards/USA SPECIALTY INSURANCE_DBA PREVENTTY_Broker_Scorecard.pptx
+++ b/generated/Tier 1 Broker Scorecards/USA SPECIALTY INSURANCE_DBA PREVENTTY_Broker_Scorecard.pptx
@@ -3357,7 +3357,7 @@
                         <a:rPr sz="800">
                           <a:latin typeface="Segoe UI"/>
                         </a:rPr>
-                        <a:t>$13,138,537.44 / $17,446,359.16 / $7,583,236.30</a:t>
+                        <a:t>$13,138,537.44 / $17,480,256.65 / $7,617,133.79</a:t>
                       </a:r>
                     </a:p>
                   </a:txBody>
@@ -3431,7 +3431,7 @@
                         <a:rPr sz="900">
                           <a:latin typeface="Segoe UI"/>
                         </a:rPr>
-                        <a:t>$18,393,952.42  (41.2% achieved)</a:t>
+                        <a:t>$18,393,952.42  (41.4% achieved)</a:t>
                       </a:r>
                     </a:p>
                   </a:txBody>
@@ -3653,7 +3653,7 @@
                         <a:rPr sz="900">
                           <a:latin typeface="Segoe UI"/>
                         </a:rPr>
-                        <a:t>Fleet Subs: 286  |  Binds: 21</a:t>
+                        <a:t>Fleet Subs: 289  |  Binds: 21</a:t>
                       </a:r>
                     </a:p>
                   </a:txBody>
@@ -3690,7 +3690,7 @@
                         <a:rPr sz="900">
                           <a:latin typeface="Segoe UI"/>
                         </a:rPr>
-                        <a:t>Fleet Bound Premium: $1,753,553.74</a:t>
+                        <a:t>Fleet Bound Premium: $1,759,643.62</a:t>
                       </a:r>
                     </a:p>
                   </a:txBody>
@@ -3766,7 +3766,7 @@
                         <a:rPr sz="900">
                           <a:latin typeface="Segoe UI"/>
                         </a:rPr>
-                        <a:t>Non-Fleet Subs: 2706  |  Binds: 225</a:t>
+                        <a:t>Non-Fleet Subs: 2740  |  Binds: 228</a:t>
                       </a:r>
                     </a:p>
                   </a:txBody>
@@ -3803,7 +3803,7 @@
                         <a:rPr sz="900">
                           <a:latin typeface="Segoe UI"/>
                         </a:rPr>
-                        <a:t>Non-Fleet Bound Premium: $5,829,682.56</a:t>
+                        <a:t>Non-Fleet Bound Premium: $5,857,490.17</a:t>
                       </a:r>
                     </a:p>
                   </a:txBody>
@@ -4351,7 +4351,7 @@
                           </a:solidFill>
                           <a:latin typeface="Segoe UI"/>
                         </a:rPr>
-                        <a:t>910</a:t>
+                        <a:t>909</a:t>
                       </a:r>
                     </a:p>
                   </a:txBody>
@@ -4428,7 +4428,7 @@
                           </a:solidFill>
                           <a:latin typeface="Segoe UI"/>
                         </a:rPr>
-                        <a:t>514</a:t>
+                        <a:t>552</a:t>
                       </a:r>
                     </a:p>
                   </a:txBody>
@@ -4624,7 +4624,7 @@
                           </a:solidFill>
                           <a:latin typeface="Segoe UI"/>
                         </a:rPr>
-                        <a:t>12.1%</a:t>
+                        <a:t>12.0%</a:t>
                       </a:r>
                     </a:p>
                   </a:txBody>
@@ -4664,7 +4664,7 @@
                         <a:rPr sz="800">
                           <a:latin typeface="Segoe UI"/>
                         </a:rPr>
-                        <a:t>13.6%</a:t>
+                        <a:t>13.3%</a:t>
                       </a:r>
                     </a:p>
                   </a:txBody>
@@ -4707,7 +4707,7 @@
                           </a:solidFill>
                           <a:latin typeface="Segoe UI"/>
                         </a:rPr>
-                        <a:t>10.5%</a:t>
+                        <a:t>10.7%</a:t>
                       </a:r>
                     </a:p>
                   </a:txBody>
@@ -4906,7 +4906,7 @@
                           </a:solidFill>
                           <a:latin typeface="Segoe UI"/>
                         </a:rPr>
-                        <a:t>110</a:t>
+                        <a:t>109</a:t>
                       </a:r>
                     </a:p>
                   </a:txBody>
@@ -4943,7 +4943,7 @@
                         <a:rPr sz="800">
                           <a:latin typeface="Segoe UI"/>
                         </a:rPr>
-                        <a:t>101</a:t>
+                        <a:t>99</a:t>
                       </a:r>
                     </a:p>
                   </a:txBody>
@@ -4983,7 +4983,7 @@
                           </a:solidFill>
                           <a:latin typeface="Segoe UI"/>
                         </a:rPr>
-                        <a:t>54</a:t>
+                        <a:t>59</a:t>
                       </a:r>
                     </a:p>
                   </a:txBody>
@@ -5262,7 +5262,7 @@
                           </a:solidFill>
                           <a:latin typeface="Segoe UI"/>
                         </a:rPr>
-                        <a:t>$1.48M</a:t>
+                        <a:t>$1.52M</a:t>
                       </a:r>
                     </a:p>
                   </a:txBody>

--- a/generated/Tier 1 Broker Scorecards/USA SPECIALTY INSURANCE_DBA PREVENTTY_Broker_Scorecard.pptx
+++ b/generated/Tier 1 Broker Scorecards/USA SPECIALTY INSURANCE_DBA PREVENTTY_Broker_Scorecard.pptx
@@ -3357,7 +3357,7 @@
                         <a:rPr sz="800">
                           <a:latin typeface="Segoe UI"/>
                         </a:rPr>
-                        <a:t>$13,138,537.44 / $17,480,256.65 / $7,617,133.79</a:t>
+                        <a:t>$13,138,537.44 / $17,484,133.48 / $7,621,010.62</a:t>
                       </a:r>
                     </a:p>
                   </a:txBody>
@@ -3394,7 +3394,7 @@
                         <a:rPr sz="900">
                           <a:latin typeface="Segoe UI"/>
                         </a:rPr>
-                        <a:t>Tier 1  |  8.22% / 15.00%</a:t>
+                        <a:t>Tier 1  |  8.21% / 15.00%</a:t>
                       </a:r>
                     </a:p>
                   </a:txBody>
@@ -3653,7 +3653,7 @@
                         <a:rPr sz="900">
                           <a:latin typeface="Segoe UI"/>
                         </a:rPr>
-                        <a:t>Fleet Subs: 289  |  Binds: 21</a:t>
+                        <a:t>Fleet Subs: 291  |  Binds: 22</a:t>
                       </a:r>
                     </a:p>
                   </a:txBody>
@@ -3690,7 +3690,7 @@
                         <a:rPr sz="900">
                           <a:latin typeface="Segoe UI"/>
                         </a:rPr>
-                        <a:t>Fleet Bound Premium: $1,759,643.62</a:t>
+                        <a:t>Fleet Bound Premium: $1,840,055.84</a:t>
                       </a:r>
                     </a:p>
                   </a:txBody>
@@ -3727,7 +3727,7 @@
                         <a:rPr sz="900">
                           <a:latin typeface="Segoe UI"/>
                         </a:rPr>
-                        <a:t>Fleet Book %: 23.1%</a:t>
+                        <a:t>Fleet Book %: 24.1%</a:t>
                       </a:r>
                     </a:p>
                   </a:txBody>
@@ -3766,7 +3766,7 @@
                         <a:rPr sz="900">
                           <a:latin typeface="Segoe UI"/>
                         </a:rPr>
-                        <a:t>Non-Fleet Subs: 2740  |  Binds: 228</a:t>
+                        <a:t>Non-Fleet Subs: 2765  |  Binds: 229</a:t>
                       </a:r>
                     </a:p>
                   </a:txBody>
@@ -3803,7 +3803,7 @@
                         <a:rPr sz="900">
                           <a:latin typeface="Segoe UI"/>
                         </a:rPr>
-                        <a:t>Non-Fleet Bound Premium: $5,857,490.17</a:t>
+                        <a:t>Non-Fleet Bound Premium: $5,780,954.78</a:t>
                       </a:r>
                     </a:p>
                   </a:txBody>
@@ -3840,7 +3840,7 @@
                         <a:rPr sz="900">
                           <a:latin typeface="Segoe UI"/>
                         </a:rPr>
-                        <a:t>Non-Fleet Book %: 76.9%</a:t>
+                        <a:t>Non-Fleet Book %: 75.9%</a:t>
                       </a:r>
                     </a:p>
                   </a:txBody>
@@ -4428,7 +4428,7 @@
                           </a:solidFill>
                           <a:latin typeface="Segoe UI"/>
                         </a:rPr>
-                        <a:t>552</a:t>
+                        <a:t>580</a:t>
                       </a:r>
                     </a:p>
                   </a:txBody>
@@ -4664,7 +4664,7 @@
                         <a:rPr sz="800">
                           <a:latin typeface="Segoe UI"/>
                         </a:rPr>
-                        <a:t>13.3%</a:t>
+                        <a:t>13.6%</a:t>
                       </a:r>
                     </a:p>
                   </a:txBody>
@@ -4707,7 +4707,7 @@
                           </a:solidFill>
                           <a:latin typeface="Segoe UI"/>
                         </a:rPr>
-                        <a:t>10.7%</a:t>
+                        <a:t>10.5%</a:t>
                       </a:r>
                     </a:p>
                   </a:txBody>
@@ -4943,7 +4943,7 @@
                         <a:rPr sz="800">
                           <a:latin typeface="Segoe UI"/>
                         </a:rPr>
-                        <a:t>99</a:t>
+                        <a:t>101</a:t>
                       </a:r>
                     </a:p>
                   </a:txBody>
@@ -4983,7 +4983,7 @@
                           </a:solidFill>
                           <a:latin typeface="Segoe UI"/>
                         </a:rPr>
-                        <a:t>59</a:t>
+                        <a:t>61</a:t>
                       </a:r>
                     </a:p>
                   </a:txBody>

--- a/generated/Tier 1 Broker Scorecards/USA SPECIALTY INSURANCE_DBA PREVENTTY_Broker_Scorecard.pptx
+++ b/generated/Tier 1 Broker Scorecards/USA SPECIALTY INSURANCE_DBA PREVENTTY_Broker_Scorecard.pptx
@@ -3357,7 +3357,7 @@
                         <a:rPr sz="800">
                           <a:latin typeface="Segoe UI"/>
                         </a:rPr>
-                        <a:t>$13,138,537.44 / $17,484,133.48 / $7,621,010.62</a:t>
+                        <a:t>$13,138,537.44 / $17,554,891.95 / $7,691,769.09</a:t>
                       </a:r>
                     </a:p>
                   </a:txBody>
@@ -3394,7 +3394,7 @@
                         <a:rPr sz="900">
                           <a:latin typeface="Segoe UI"/>
                         </a:rPr>
-                        <a:t>Tier 1  |  8.21% / 15.00%</a:t>
+                        <a:t>Tier 1  |  8.09% / 15.00%</a:t>
                       </a:r>
                     </a:p>
                   </a:txBody>
@@ -3431,7 +3431,7 @@
                         <a:rPr sz="900">
                           <a:latin typeface="Segoe UI"/>
                         </a:rPr>
-                        <a:t>$18,393,952.42  (41.4% achieved)</a:t>
+                        <a:t>$18,393,952.42  (41.8% achieved)</a:t>
                       </a:r>
                     </a:p>
                   </a:txBody>
@@ -3653,7 +3653,7 @@
                         <a:rPr sz="900">
                           <a:latin typeface="Segoe UI"/>
                         </a:rPr>
-                        <a:t>Fleet Subs: 291  |  Binds: 22</a:t>
+                        <a:t>Fleet Subs: 291  |  Binds: 21</a:t>
                       </a:r>
                     </a:p>
                   </a:txBody>
@@ -3690,7 +3690,7 @@
                         <a:rPr sz="900">
                           <a:latin typeface="Segoe UI"/>
                         </a:rPr>
-                        <a:t>Fleet Bound Premium: $1,840,055.84</a:t>
+                        <a:t>Fleet Bound Premium: $1,789,910.91</a:t>
                       </a:r>
                     </a:p>
                   </a:txBody>
@@ -3727,7 +3727,7 @@
                         <a:rPr sz="900">
                           <a:latin typeface="Segoe UI"/>
                         </a:rPr>
-                        <a:t>Fleet Book %: 24.1%</a:t>
+                        <a:t>Fleet Book %: 23.3%</a:t>
                       </a:r>
                     </a:p>
                   </a:txBody>
@@ -3766,7 +3766,7 @@
                         <a:rPr sz="900">
                           <a:latin typeface="Segoe UI"/>
                         </a:rPr>
-                        <a:t>Non-Fleet Subs: 2765  |  Binds: 229</a:t>
+                        <a:t>Non-Fleet Subs: 2800  |  Binds: 229</a:t>
                       </a:r>
                     </a:p>
                   </a:txBody>
@@ -3803,7 +3803,7 @@
                         <a:rPr sz="900">
                           <a:latin typeface="Segoe UI"/>
                         </a:rPr>
-                        <a:t>Non-Fleet Bound Premium: $5,780,954.78</a:t>
+                        <a:t>Non-Fleet Bound Premium: $5,901,858.18</a:t>
                       </a:r>
                     </a:p>
                   </a:txBody>
@@ -3840,7 +3840,7 @@
                         <a:rPr sz="900">
                           <a:latin typeface="Segoe UI"/>
                         </a:rPr>
-                        <a:t>Non-Fleet Book %: 75.9%</a:t>
+                        <a:t>Non-Fleet Book %: 76.7%</a:t>
                       </a:r>
                     </a:p>
                   </a:txBody>
@@ -4351,7 +4351,7 @@
                           </a:solidFill>
                           <a:latin typeface="Segoe UI"/>
                         </a:rPr>
-                        <a:t>909</a:t>
+                        <a:t>908</a:t>
                       </a:r>
                     </a:p>
                   </a:txBody>
@@ -4428,7 +4428,7 @@
                           </a:solidFill>
                           <a:latin typeface="Segoe UI"/>
                         </a:rPr>
-                        <a:t>580</a:t>
+                        <a:t>622</a:t>
                       </a:r>
                     </a:p>
                   </a:txBody>
@@ -4707,7 +4707,7 @@
                           </a:solidFill>
                           <a:latin typeface="Segoe UI"/>
                         </a:rPr>
-                        <a:t>10.5%</a:t>
+                        <a:t>10.0%</a:t>
                       </a:r>
                     </a:p>
                   </a:txBody>
@@ -4747,7 +4747,7 @@
                         <a:rPr sz="800">
                           <a:latin typeface="Segoe UI"/>
                         </a:rPr>
-                        <a:t>15.6%</a:t>
+                        <a:t>15.7%</a:t>
                       </a:r>
                     </a:p>
                   </a:txBody>
@@ -4983,7 +4983,7 @@
                           </a:solidFill>
                           <a:latin typeface="Segoe UI"/>
                         </a:rPr>
-                        <a:t>61</a:t>
+                        <a:t>62</a:t>
                       </a:r>
                     </a:p>
                   </a:txBody>
@@ -5020,7 +5020,7 @@
                         <a:rPr sz="800">
                           <a:latin typeface="Segoe UI"/>
                         </a:rPr>
-                        <a:t>114</a:t>
+                        <a:t>115</a:t>
                       </a:r>
                     </a:p>
                   </a:txBody>
@@ -5262,7 +5262,7 @@
                           </a:solidFill>
                           <a:latin typeface="Segoe UI"/>
                         </a:rPr>
-                        <a:t>$1.52M</a:t>
+                        <a:t>$1.59M</a:t>
                       </a:r>
                     </a:p>
                   </a:txBody>

--- a/generated/Tier 1 Broker Scorecards/USA SPECIALTY INSURANCE_DBA PREVENTTY_Broker_Scorecard.pptx
+++ b/generated/Tier 1 Broker Scorecards/USA SPECIALTY INSURANCE_DBA PREVENTTY_Broker_Scorecard.pptx
@@ -3357,7 +3357,7 @@
                         <a:rPr sz="800">
                           <a:latin typeface="Segoe UI"/>
                         </a:rPr>
-                        <a:t>$13,138,537.44 / $17,554,891.95 / $7,691,769.09</a:t>
+                        <a:t>$13,138,537.44 / $17,655,224.58 / $7,792,101.72</a:t>
                       </a:r>
                     </a:p>
                   </a:txBody>
@@ -3394,7 +3394,7 @@
                         <a:rPr sz="900">
                           <a:latin typeface="Segoe UI"/>
                         </a:rPr>
-                        <a:t>Tier 1  |  8.09% / 15.00%</a:t>
+                        <a:t>Tier 1  |  8.18% / 15.00%</a:t>
                       </a:r>
                     </a:p>
                   </a:txBody>
@@ -3431,7 +3431,7 @@
                         <a:rPr sz="900">
                           <a:latin typeface="Segoe UI"/>
                         </a:rPr>
-                        <a:t>$18,393,952.42  (41.8% achieved)</a:t>
+                        <a:t>$18,393,952.42  (42.4% achieved)</a:t>
                       </a:r>
                     </a:p>
                   </a:txBody>
@@ -3653,7 +3653,7 @@
                         <a:rPr sz="900">
                           <a:latin typeface="Segoe UI"/>
                         </a:rPr>
-                        <a:t>Fleet Subs: 291  |  Binds: 21</a:t>
+                        <a:t>Fleet Subs: 294  |  Binds: 22</a:t>
                       </a:r>
                     </a:p>
                   </a:txBody>
@@ -3690,7 +3690,7 @@
                         <a:rPr sz="900">
                           <a:latin typeface="Segoe UI"/>
                         </a:rPr>
-                        <a:t>Fleet Bound Premium: $1,789,910.91</a:t>
+                        <a:t>Fleet Bound Premium: $1,850,822.71</a:t>
                       </a:r>
                     </a:p>
                   </a:txBody>
@@ -3727,7 +3727,7 @@
                         <a:rPr sz="900">
                           <a:latin typeface="Segoe UI"/>
                         </a:rPr>
-                        <a:t>Fleet Book %: 23.3%</a:t>
+                        <a:t>Fleet Book %: 23.8%</a:t>
                       </a:r>
                     </a:p>
                   </a:txBody>
@@ -3766,7 +3766,7 @@
                         <a:rPr sz="900">
                           <a:latin typeface="Segoe UI"/>
                         </a:rPr>
-                        <a:t>Non-Fleet Subs: 2800  |  Binds: 229</a:t>
+                        <a:t>Non-Fleet Subs: 2822  |  Binds: 233</a:t>
                       </a:r>
                     </a:p>
                   </a:txBody>
@@ -3803,7 +3803,7 @@
                         <a:rPr sz="900">
                           <a:latin typeface="Segoe UI"/>
                         </a:rPr>
-                        <a:t>Non-Fleet Bound Premium: $5,901,858.18</a:t>
+                        <a:t>Non-Fleet Bound Premium: $5,941,279.01</a:t>
                       </a:r>
                     </a:p>
                   </a:txBody>
@@ -3840,7 +3840,7 @@
                         <a:rPr sz="900">
                           <a:latin typeface="Segoe UI"/>
                         </a:rPr>
-                        <a:t>Non-Fleet Book %: 76.7%</a:t>
+                        <a:t>Non-Fleet Book %: 76.2%</a:t>
                       </a:r>
                     </a:p>
                   </a:txBody>
@@ -4428,7 +4428,7 @@
                           </a:solidFill>
                           <a:latin typeface="Segoe UI"/>
                         </a:rPr>
-                        <a:t>622</a:t>
+                        <a:t>650</a:t>
                       </a:r>
                     </a:p>
                   </a:txBody>
@@ -4707,7 +4707,7 @@
                           </a:solidFill>
                           <a:latin typeface="Segoe UI"/>
                         </a:rPr>
-                        <a:t>10.0%</a:t>
+                        <a:t>9.8%</a:t>
                       </a:r>
                     </a:p>
                   </a:txBody>
@@ -4747,7 +4747,7 @@
                         <a:rPr sz="800">
                           <a:latin typeface="Segoe UI"/>
                         </a:rPr>
-                        <a:t>15.7%</a:t>
+                        <a:t>15.6%</a:t>
                       </a:r>
                     </a:p>
                   </a:txBody>
@@ -4983,7 +4983,7 @@
                           </a:solidFill>
                           <a:latin typeface="Segoe UI"/>
                         </a:rPr>
-                        <a:t>62</a:t>
+                        <a:t>64</a:t>
                       </a:r>
                     </a:p>
                   </a:txBody>
@@ -5020,7 +5020,7 @@
                         <a:rPr sz="800">
                           <a:latin typeface="Segoe UI"/>
                         </a:rPr>
-                        <a:t>115</a:t>
+                        <a:t>114</a:t>
                       </a:r>
                     </a:p>
                   </a:txBody>
@@ -5262,7 +5262,7 @@
                           </a:solidFill>
                           <a:latin typeface="Segoe UI"/>
                         </a:rPr>
-                        <a:t>$1.59M</a:t>
+                        <a:t>$1.69M</a:t>
                       </a:r>
                     </a:p>
                   </a:txBody>

--- a/generated/Tier 1 Broker Scorecards/USA SPECIALTY INSURANCE_DBA PREVENTTY_Broker_Scorecard.pptx
+++ b/generated/Tier 1 Broker Scorecards/USA SPECIALTY INSURANCE_DBA PREVENTTY_Broker_Scorecard.pptx
@@ -3357,7 +3357,7 @@
                         <a:rPr sz="800">
                           <a:latin typeface="Segoe UI"/>
                         </a:rPr>
-                        <a:t>$13,138,537.44 / $17,655,224.58 / $7,792,101.72</a:t>
+                        <a:t>$13,138,537.44 / $17,726,086.15 / $7,862,963.29</a:t>
                       </a:r>
                     </a:p>
                   </a:txBody>
@@ -3394,7 +3394,7 @@
                         <a:rPr sz="900">
                           <a:latin typeface="Segoe UI"/>
                         </a:rPr>
-                        <a:t>Tier 1  |  8.18% / 15.00%</a:t>
+                        <a:t>Tier 1  |  8.36% / 15.00%</a:t>
                       </a:r>
                     </a:p>
                   </a:txBody>
@@ -3431,7 +3431,7 @@
                         <a:rPr sz="900">
                           <a:latin typeface="Segoe UI"/>
                         </a:rPr>
-                        <a:t>$18,393,952.42  (42.4% achieved)</a:t>
+                        <a:t>$18,393,952.42  (42.7% achieved)</a:t>
                       </a:r>
                     </a:p>
                   </a:txBody>
@@ -3653,7 +3653,7 @@
                         <a:rPr sz="900">
                           <a:latin typeface="Segoe UI"/>
                         </a:rPr>
-                        <a:t>Fleet Subs: 294  |  Binds: 22</a:t>
+                        <a:t>Fleet Subs: 297  |  Binds: 23</a:t>
                       </a:r>
                     </a:p>
                   </a:txBody>
@@ -3690,7 +3690,7 @@
                         <a:rPr sz="900">
                           <a:latin typeface="Segoe UI"/>
                         </a:rPr>
-                        <a:t>Fleet Bound Premium: $1,850,822.71</a:t>
+                        <a:t>Fleet Bound Premium: $1,864,157.35</a:t>
                       </a:r>
                     </a:p>
                   </a:txBody>
@@ -3727,7 +3727,7 @@
                         <a:rPr sz="900">
                           <a:latin typeface="Segoe UI"/>
                         </a:rPr>
-                        <a:t>Fleet Book %: 23.8%</a:t>
+                        <a:t>Fleet Book %: 23.7%</a:t>
                       </a:r>
                     </a:p>
                   </a:txBody>
@@ -3766,7 +3766,7 @@
                         <a:rPr sz="900">
                           <a:latin typeface="Segoe UI"/>
                         </a:rPr>
-                        <a:t>Non-Fleet Subs: 2822  |  Binds: 233</a:t>
+                        <a:t>Non-Fleet Subs: 2837  |  Binds: 239</a:t>
                       </a:r>
                     </a:p>
                   </a:txBody>
@@ -3803,7 +3803,7 @@
                         <a:rPr sz="900">
                           <a:latin typeface="Segoe UI"/>
                         </a:rPr>
-                        <a:t>Non-Fleet Bound Premium: $5,941,279.01</a:t>
+                        <a:t>Non-Fleet Bound Premium: $5,998,805.94</a:t>
                       </a:r>
                     </a:p>
                   </a:txBody>
@@ -3840,7 +3840,7 @@
                         <a:rPr sz="900">
                           <a:latin typeface="Segoe UI"/>
                         </a:rPr>
-                        <a:t>Non-Fleet Book %: 76.2%</a:t>
+                        <a:t>Non-Fleet Book %: 76.3%</a:t>
                       </a:r>
                     </a:p>
                   </a:txBody>
@@ -4428,7 +4428,7 @@
                           </a:solidFill>
                           <a:latin typeface="Segoe UI"/>
                         </a:rPr>
-                        <a:t>650</a:t>
+                        <a:t>670</a:t>
                       </a:r>
                     </a:p>
                   </a:txBody>
@@ -4624,7 +4624,7 @@
                           </a:solidFill>
                           <a:latin typeface="Segoe UI"/>
                         </a:rPr>
-                        <a:t>12.0%</a:t>
+                        <a:t>11.9%</a:t>
                       </a:r>
                     </a:p>
                   </a:txBody>
@@ -4664,7 +4664,7 @@
                         <a:rPr sz="800">
                           <a:latin typeface="Segoe UI"/>
                         </a:rPr>
-                        <a:t>13.6%</a:t>
+                        <a:t>13.5%</a:t>
                       </a:r>
                     </a:p>
                   </a:txBody>
@@ -4707,7 +4707,7 @@
                           </a:solidFill>
                           <a:latin typeface="Segoe UI"/>
                         </a:rPr>
-                        <a:t>9.8%</a:t>
+                        <a:t>10.3%</a:t>
                       </a:r>
                     </a:p>
                   </a:txBody>
@@ -4747,7 +4747,7 @@
                         <a:rPr sz="800">
                           <a:latin typeface="Segoe UI"/>
                         </a:rPr>
-                        <a:t>15.6%</a:t>
+                        <a:t>15.7%</a:t>
                       </a:r>
                     </a:p>
                   </a:txBody>
@@ -4906,7 +4906,7 @@
                           </a:solidFill>
                           <a:latin typeface="Segoe UI"/>
                         </a:rPr>
-                        <a:t>109</a:t>
+                        <a:t>108</a:t>
                       </a:r>
                     </a:p>
                   </a:txBody>
@@ -4943,7 +4943,7 @@
                         <a:rPr sz="800">
                           <a:latin typeface="Segoe UI"/>
                         </a:rPr>
-                        <a:t>101</a:t>
+                        <a:t>100</a:t>
                       </a:r>
                     </a:p>
                   </a:txBody>
@@ -4983,7 +4983,7 @@
                           </a:solidFill>
                           <a:latin typeface="Segoe UI"/>
                         </a:rPr>
-                        <a:t>64</a:t>
+                        <a:t>69</a:t>
                       </a:r>
                     </a:p>
                   </a:txBody>
@@ -5020,7 +5020,7 @@
                         <a:rPr sz="800">
                           <a:latin typeface="Segoe UI"/>
                         </a:rPr>
-                        <a:t>114</a:t>
+                        <a:t>115</a:t>
                       </a:r>
                     </a:p>
                   </a:txBody>
@@ -5262,7 +5262,7 @@
                           </a:solidFill>
                           <a:latin typeface="Segoe UI"/>
                         </a:rPr>
-                        <a:t>$1.69M</a:t>
+                        <a:t>$1.76M</a:t>
                       </a:r>
                     </a:p>
                   </a:txBody>
@@ -5345,7 +5345,7 @@
                           </a:solidFill>
                           <a:latin typeface="Segoe UI"/>
                         </a:rPr>
-                        <a:t>$32.0K</a:t>
+                        <a:t>$35.0K</a:t>
                       </a:r>
                     </a:p>
                   </a:txBody>

--- a/generated/Tier 1 Broker Scorecards/USA SPECIALTY INSURANCE_DBA PREVENTTY_Broker_Scorecard.pptx
+++ b/generated/Tier 1 Broker Scorecards/USA SPECIALTY INSURANCE_DBA PREVENTTY_Broker_Scorecard.pptx
@@ -3394,7 +3394,7 @@
                         <a:rPr sz="900">
                           <a:latin typeface="Segoe UI"/>
                         </a:rPr>
-                        <a:t>Tier 1  |  8.36% / 15.00%</a:t>
+                        <a:t>Tier 1  |  8.39% / 15.00%</a:t>
                       </a:r>
                     </a:p>
                   </a:txBody>
@@ -3653,7 +3653,7 @@
                         <a:rPr sz="900">
                           <a:latin typeface="Segoe UI"/>
                         </a:rPr>
-                        <a:t>Fleet Subs: 297  |  Binds: 23</a:t>
+                        <a:t>Fleet Subs: 296  |  Binds: 22</a:t>
                       </a:r>
                     </a:p>
                   </a:txBody>
@@ -3690,7 +3690,7 @@
                         <a:rPr sz="900">
                           <a:latin typeface="Segoe UI"/>
                         </a:rPr>
-                        <a:t>Fleet Bound Premium: $1,864,157.35</a:t>
+                        <a:t>Fleet Bound Premium: $1,782,524.22</a:t>
                       </a:r>
                     </a:p>
                   </a:txBody>
@@ -3727,7 +3727,7 @@
                         <a:rPr sz="900">
                           <a:latin typeface="Segoe UI"/>
                         </a:rPr>
-                        <a:t>Fleet Book %: 23.7%</a:t>
+                        <a:t>Fleet Book %: 22.7%</a:t>
                       </a:r>
                     </a:p>
                   </a:txBody>
@@ -3766,7 +3766,7 @@
                         <a:rPr sz="900">
                           <a:latin typeface="Segoe UI"/>
                         </a:rPr>
-                        <a:t>Non-Fleet Subs: 2837  |  Binds: 239</a:t>
+                        <a:t>Non-Fleet Subs: 2839  |  Binds: 241</a:t>
                       </a:r>
                     </a:p>
                   </a:txBody>
@@ -3803,7 +3803,7 @@
                         <a:rPr sz="900">
                           <a:latin typeface="Segoe UI"/>
                         </a:rPr>
-                        <a:t>Non-Fleet Bound Premium: $5,998,805.94</a:t>
+                        <a:t>Non-Fleet Bound Premium: $6,080,439.07</a:t>
                       </a:r>
                     </a:p>
                   </a:txBody>
@@ -3840,7 +3840,7 @@
                         <a:rPr sz="900">
                           <a:latin typeface="Segoe UI"/>
                         </a:rPr>
-                        <a:t>Non-Fleet Book %: 76.3%</a:t>
+                        <a:t>Non-Fleet Book %: 77.3%</a:t>
                       </a:r>
                     </a:p>
                   </a:txBody>
@@ -4428,7 +4428,7 @@
                           </a:solidFill>
                           <a:latin typeface="Segoe UI"/>
                         </a:rPr>
-                        <a:t>670</a:t>
+                        <a:t>671</a:t>
                       </a:r>
                     </a:p>
                   </a:txBody>
@@ -4664,7 +4664,7 @@
                         <a:rPr sz="800">
                           <a:latin typeface="Segoe UI"/>
                         </a:rPr>
-                        <a:t>13.5%</a:t>
+                        <a:t>13.6%</a:t>
                       </a:r>
                     </a:p>
                   </a:txBody>
@@ -4747,7 +4747,7 @@
                         <a:rPr sz="800">
                           <a:latin typeface="Segoe UI"/>
                         </a:rPr>
-                        <a:t>15.7%</a:t>
+                        <a:t>15.6%</a:t>
                       </a:r>
                     </a:p>
                   </a:txBody>
@@ -4943,7 +4943,7 @@
                         <a:rPr sz="800">
                           <a:latin typeface="Segoe UI"/>
                         </a:rPr>
-                        <a:t>100</a:t>
+                        <a:t>101</a:t>
                       </a:r>
                     </a:p>
                   </a:txBody>
@@ -5020,7 +5020,7 @@
                         <a:rPr sz="800">
                           <a:latin typeface="Segoe UI"/>
                         </a:rPr>
-                        <a:t>115</a:t>
+                        <a:t>114</a:t>
                       </a:r>
                     </a:p>
                   </a:txBody>

--- a/generated/Tier 1 Broker Scorecards/USA SPECIALTY INSURANCE_DBA PREVENTTY_Broker_Scorecard.pptx
+++ b/generated/Tier 1 Broker Scorecards/USA SPECIALTY INSURANCE_DBA PREVENTTY_Broker_Scorecard.pptx
@@ -3357,7 +3357,7 @@
                         <a:rPr sz="800">
                           <a:latin typeface="Segoe UI"/>
                         </a:rPr>
-                        <a:t>$13,138,537.44 / $17,726,086.15 / $7,862,963.29</a:t>
+                        <a:t>$13,138,537.44 / $16,451,689.84 / $7,897,999.88</a:t>
                       </a:r>
                     </a:p>
                   </a:txBody>
@@ -3431,7 +3431,7 @@
                         <a:rPr sz="900">
                           <a:latin typeface="Segoe UI"/>
                         </a:rPr>
-                        <a:t>$18,393,952.42  (42.7% achieved)</a:t>
+                        <a:t>$18,393,952.42  (42.9% achieved)</a:t>
                       </a:r>
                     </a:p>
                   </a:txBody>
@@ -3653,7 +3653,7 @@
                         <a:rPr sz="900">
                           <a:latin typeface="Segoe UI"/>
                         </a:rPr>
-                        <a:t>Fleet Subs: 296  |  Binds: 22</a:t>
+                        <a:t>Fleet Subs: 297  |  Binds: 22</a:t>
                       </a:r>
                     </a:p>
                   </a:txBody>
@@ -3690,7 +3690,7 @@
                         <a:rPr sz="900">
                           <a:latin typeface="Segoe UI"/>
                         </a:rPr>
-                        <a:t>Fleet Bound Premium: $1,782,524.22</a:t>
+                        <a:t>Fleet Bound Premium: $1,778,656.60</a:t>
                       </a:r>
                     </a:p>
                   </a:txBody>
@@ -3727,7 +3727,7 @@
                         <a:rPr sz="900">
                           <a:latin typeface="Segoe UI"/>
                         </a:rPr>
-                        <a:t>Fleet Book %: 22.7%</a:t>
+                        <a:t>Fleet Book %: 22.5%</a:t>
                       </a:r>
                     </a:p>
                   </a:txBody>
@@ -3803,7 +3803,7 @@
                         <a:rPr sz="900">
                           <a:latin typeface="Segoe UI"/>
                         </a:rPr>
-                        <a:t>Non-Fleet Bound Premium: $6,080,439.07</a:t>
+                        <a:t>Non-Fleet Bound Premium: $6,119,343.28</a:t>
                       </a:r>
                     </a:p>
                   </a:txBody>
@@ -3840,7 +3840,7 @@
                         <a:rPr sz="900">
                           <a:latin typeface="Segoe UI"/>
                         </a:rPr>
-                        <a:t>Non-Fleet Book %: 77.3%</a:t>
+                        <a:t>Non-Fleet Book %: 77.5%</a:t>
                       </a:r>
                     </a:p>
                   </a:txBody>
@@ -4428,7 +4428,7 @@
                           </a:solidFill>
                           <a:latin typeface="Segoe UI"/>
                         </a:rPr>
-                        <a:t>671</a:t>
+                        <a:t>672</a:t>
                       </a:r>
                     </a:p>
                   </a:txBody>
@@ -4500,9 +4500,12 @@
                       <a:pPr algn="ctr"/>
                       <a:r>
                         <a:rPr sz="800">
+                          <a:solidFill>
+                            <a:srgbClr val="DC2626"/>
+                          </a:solidFill>
                           <a:latin typeface="Segoe UI"/>
                         </a:rPr>
-                        <a:t/>
+                        <a:t>1</a:t>
                       </a:r>
                     </a:p>
                   </a:txBody>
@@ -4707,7 +4710,7 @@
                           </a:solidFill>
                           <a:latin typeface="Segoe UI"/>
                         </a:rPr>
-                        <a:t>10.3%</a:t>
+                        <a:t>10.1%</a:t>
                       </a:r>
                     </a:p>
                   </a:txBody>
@@ -4747,7 +4750,7 @@
                         <a:rPr sz="800">
                           <a:latin typeface="Segoe UI"/>
                         </a:rPr>
-                        <a:t>15.6%</a:t>
+                        <a:t>15.7%</a:t>
                       </a:r>
                     </a:p>
                   </a:txBody>
@@ -4983,7 +4986,7 @@
                           </a:solidFill>
                           <a:latin typeface="Segoe UI"/>
                         </a:rPr>
-                        <a:t>69</a:t>
+                        <a:t>68</a:t>
                       </a:r>
                     </a:p>
                   </a:txBody>
@@ -5020,7 +5023,7 @@
                         <a:rPr sz="800">
                           <a:latin typeface="Segoe UI"/>
                         </a:rPr>
-                        <a:t>114</a:t>
+                        <a:t>115</a:t>
                       </a:r>
                     </a:p>
                   </a:txBody>
